--- a/seminar-ios-vku-ca2.pptx
+++ b/seminar-ios-vku-ca2.pptx
@@ -5,7 +5,7 @@
     <p:sldMasterId id="2147483648" r:id="rId1"/>
   </p:sldMasterIdLst>
   <p:notesMasterIdLst>
-    <p:notesMasterId r:id="rId33"/>
+    <p:notesMasterId r:id="rId35"/>
   </p:notesMasterIdLst>
   <p:sldIdLst>
     <p:sldId id="256" r:id="rId2"/>
@@ -37,8 +37,10 @@
     <p:sldId id="283" r:id="rId28"/>
     <p:sldId id="284" r:id="rId29"/>
     <p:sldId id="286" r:id="rId30"/>
-    <p:sldId id="285" r:id="rId31"/>
-    <p:sldId id="287" r:id="rId32"/>
+    <p:sldId id="290" r:id="rId31"/>
+    <p:sldId id="285" r:id="rId32"/>
+    <p:sldId id="289" r:id="rId33"/>
+    <p:sldId id="287" r:id="rId34"/>
   </p:sldIdLst>
   <p:sldSz cx="12192000" cy="6858000"/>
   <p:notesSz cx="6858000" cy="12192000"/>
@@ -2204,7 +2206,13 @@
   <p:cSld>
     <p:spTree>
       <p:nvGrpSpPr>
-        <p:cNvPr id="1" name=""/>
+        <p:cNvPr id="1" name="">
+          <a:extLst>
+            <a:ext uri="{FF2B5EF4-FFF2-40B4-BE49-F238E27FC236}">
+              <a16:creationId xmlns:a16="http://schemas.microsoft.com/office/drawing/2014/main" id="{E5273814-034A-7DE0-DCD1-67FA452228DE}"/>
+            </a:ext>
+          </a:extLst>
+        </p:cNvPr>
         <p:cNvGrpSpPr/>
         <p:nvPr/>
       </p:nvGrpSpPr>
@@ -2218,7 +2226,13 @@
       </p:grpSpPr>
       <p:sp>
         <p:nvSpPr>
-          <p:cNvPr id="2" name="Slide Image Placeholder 1"/>
+          <p:cNvPr id="2" name="Slide Image Placeholder 1">
+            <a:extLst>
+              <a:ext uri="{FF2B5EF4-FFF2-40B4-BE49-F238E27FC236}">
+                <a16:creationId xmlns:a16="http://schemas.microsoft.com/office/drawing/2014/main" id="{7F564B37-8850-394D-1787-3A0A4D598769}"/>
+              </a:ext>
+            </a:extLst>
+          </p:cNvPr>
           <p:cNvSpPr>
             <a:spLocks noGrp="1" noRot="1" noChangeAspect="1"/>
           </p:cNvSpPr>
@@ -2230,7 +2244,13 @@
       </p:sp>
       <p:sp>
         <p:nvSpPr>
-          <p:cNvPr id="3" name="Notes Placeholder 2"/>
+          <p:cNvPr id="3" name="Notes Placeholder 2">
+            <a:extLst>
+              <a:ext uri="{FF2B5EF4-FFF2-40B4-BE49-F238E27FC236}">
+                <a16:creationId xmlns:a16="http://schemas.microsoft.com/office/drawing/2014/main" id="{4F3395A3-7FE0-A78C-70C8-6AED350CFD71}"/>
+              </a:ext>
+            </a:extLst>
+          </p:cNvPr>
           <p:cNvSpPr>
             <a:spLocks noGrp="1"/>
           </p:cNvSpPr>
@@ -2249,7 +2269,13 @@
       </p:sp>
       <p:sp>
         <p:nvSpPr>
-          <p:cNvPr id="4" name="Slide Number Placeholder 3"/>
+          <p:cNvPr id="4" name="Slide Number Placeholder 3">
+            <a:extLst>
+              <a:ext uri="{FF2B5EF4-FFF2-40B4-BE49-F238E27FC236}">
+                <a16:creationId xmlns:a16="http://schemas.microsoft.com/office/drawing/2014/main" id="{8364C96B-BB43-6FE8-AC82-BCA182029246}"/>
+              </a:ext>
+            </a:extLst>
+          </p:cNvPr>
           <p:cNvSpPr>
             <a:spLocks noGrp="1"/>
           </p:cNvSpPr>
@@ -2273,7 +2299,7 @@
     </p:spTree>
     <p:extLst>
       <p:ext uri="{BB962C8B-B14F-4D97-AF65-F5344CB8AC3E}">
-        <p14:creationId xmlns:p14="http://schemas.microsoft.com/office/powerpoint/2010/main" val="1024086991"/>
+        <p14:creationId xmlns:p14="http://schemas.microsoft.com/office/powerpoint/2010/main" val="844834379"/>
       </p:ext>
     </p:extLst>
   </p:cSld>
@@ -2349,6 +2375,90 @@
             <a:fld id="{F7021451-1387-4CA6-816F-3879F97B5CBC}" type="slidenum">
               <a:rPr lang="en-US"/>
               <a:t>31</a:t>
+            </a:fld>
+            <a:endParaRPr lang="en-US"/>
+          </a:p>
+        </p:txBody>
+      </p:sp>
+    </p:spTree>
+    <p:extLst>
+      <p:ext uri="{BB962C8B-B14F-4D97-AF65-F5344CB8AC3E}">
+        <p14:creationId xmlns:p14="http://schemas.microsoft.com/office/powerpoint/2010/main" val="1024086991"/>
+      </p:ext>
+    </p:extLst>
+  </p:cSld>
+  <p:clrMapOvr>
+    <a:masterClrMapping/>
+  </p:clrMapOvr>
+</p:notes>
+</file>
+
+<file path=ppt/notesSlides/notesSlide32.xml><?xml version="1.0" encoding="utf-8"?>
+<p:notes xmlns:a="http://schemas.openxmlformats.org/drawingml/2006/main" xmlns:r="http://schemas.openxmlformats.org/officeDocument/2006/relationships" xmlns:p="http://schemas.openxmlformats.org/presentationml/2006/main">
+  <p:cSld>
+    <p:spTree>
+      <p:nvGrpSpPr>
+        <p:cNvPr id="1" name=""/>
+        <p:cNvGrpSpPr/>
+        <p:nvPr/>
+      </p:nvGrpSpPr>
+      <p:grpSpPr>
+        <a:xfrm>
+          <a:off x="0" y="0"/>
+          <a:ext cx="0" cy="0"/>
+          <a:chOff x="0" y="0"/>
+          <a:chExt cx="0" cy="0"/>
+        </a:xfrm>
+      </p:grpSpPr>
+      <p:sp>
+        <p:nvSpPr>
+          <p:cNvPr id="2" name="Slide Image Placeholder 1"/>
+          <p:cNvSpPr>
+            <a:spLocks noGrp="1" noRot="1" noChangeAspect="1"/>
+          </p:cNvSpPr>
+          <p:nvPr>
+            <p:ph type="sldImg"/>
+          </p:nvPr>
+        </p:nvSpPr>
+        <p:spPr/>
+      </p:sp>
+      <p:sp>
+        <p:nvSpPr>
+          <p:cNvPr id="3" name="Notes Placeholder 2"/>
+          <p:cNvSpPr>
+            <a:spLocks noGrp="1"/>
+          </p:cNvSpPr>
+          <p:nvPr>
+            <p:ph type="body" idx="1"/>
+          </p:nvPr>
+        </p:nvSpPr>
+        <p:spPr/>
+        <p:txBody>
+          <a:bodyPr/>
+          <a:lstStyle/>
+          <a:p>
+            <a:endParaRPr lang="en-US" dirty="0"/>
+          </a:p>
+        </p:txBody>
+      </p:sp>
+      <p:sp>
+        <p:nvSpPr>
+          <p:cNvPr id="4" name="Slide Number Placeholder 3"/>
+          <p:cNvSpPr>
+            <a:spLocks noGrp="1"/>
+          </p:cNvSpPr>
+          <p:nvPr>
+            <p:ph type="sldNum" sz="quarter" idx="10"/>
+          </p:nvPr>
+        </p:nvSpPr>
+        <p:spPr/>
+        <p:txBody>
+          <a:bodyPr/>
+          <a:lstStyle/>
+          <a:p>
+            <a:fld id="{F7021451-1387-4CA6-816F-3879F97B5CBC}" type="slidenum">
+              <a:rPr lang="en-US"/>
+              <a:t>33</a:t>
             </a:fld>
             <a:endParaRPr lang="en-US"/>
           </a:p>
@@ -14669,6 +14779,278 @@
 
 <file path=ppt/slides/slide30.xml><?xml version="1.0" encoding="utf-8"?>
 <p:sld xmlns:a="http://schemas.openxmlformats.org/drawingml/2006/main" xmlns:r="http://schemas.openxmlformats.org/officeDocument/2006/relationships" xmlns:p="http://schemas.openxmlformats.org/presentationml/2006/main">
+  <p:cSld>
+    <p:spTree>
+      <p:nvGrpSpPr>
+        <p:cNvPr id="1" name="">
+          <a:extLst>
+            <a:ext uri="{FF2B5EF4-FFF2-40B4-BE49-F238E27FC236}">
+              <a16:creationId xmlns:a16="http://schemas.microsoft.com/office/drawing/2014/main" id="{F225655A-D65C-8C89-56A1-4BED67488032}"/>
+            </a:ext>
+          </a:extLst>
+        </p:cNvPr>
+        <p:cNvGrpSpPr/>
+        <p:nvPr/>
+      </p:nvGrpSpPr>
+      <p:grpSpPr>
+        <a:xfrm>
+          <a:off x="0" y="0"/>
+          <a:ext cx="0" cy="0"/>
+          <a:chOff x="0" y="0"/>
+          <a:chExt cx="0" cy="0"/>
+        </a:xfrm>
+      </p:grpSpPr>
+      <p:sp>
+        <p:nvSpPr>
+          <p:cNvPr id="2" name="Shape 0">
+            <a:extLst>
+              <a:ext uri="{FF2B5EF4-FFF2-40B4-BE49-F238E27FC236}">
+                <a16:creationId xmlns:a16="http://schemas.microsoft.com/office/drawing/2014/main" id="{422B0744-5869-D2CA-3098-EB43958F29F3}"/>
+              </a:ext>
+            </a:extLst>
+          </p:cNvPr>
+          <p:cNvSpPr/>
+          <p:nvPr/>
+        </p:nvSpPr>
+        <p:spPr>
+          <a:xfrm>
+            <a:off x="0" y="0"/>
+            <a:ext cx="164592" cy="6858000"/>
+          </a:xfrm>
+          <a:prstGeom prst="rect">
+            <a:avLst/>
+          </a:prstGeom>
+          <a:solidFill>
+            <a:srgbClr val="2E7D32"/>
+          </a:solidFill>
+          <a:ln w="12700">
+            <a:solidFill>
+              <a:srgbClr val="2E7D32"/>
+            </a:solidFill>
+            <a:prstDash val="solid"/>
+          </a:ln>
+        </p:spPr>
+        <p:txBody>
+          <a:bodyPr/>
+          <a:lstStyle/>
+          <a:p>
+            <a:endParaRPr/>
+          </a:p>
+        </p:txBody>
+      </p:sp>
+      <p:sp>
+        <p:nvSpPr>
+          <p:cNvPr id="3" name="Shape 1">
+            <a:extLst>
+              <a:ext uri="{FF2B5EF4-FFF2-40B4-BE49-F238E27FC236}">
+                <a16:creationId xmlns:a16="http://schemas.microsoft.com/office/drawing/2014/main" id="{AF086803-D107-F690-9BA1-74C1A09A7C0C}"/>
+              </a:ext>
+            </a:extLst>
+          </p:cNvPr>
+          <p:cNvSpPr/>
+          <p:nvPr/>
+        </p:nvSpPr>
+        <p:spPr>
+          <a:xfrm>
+            <a:off x="11521440" y="0"/>
+            <a:ext cx="640080" cy="164592"/>
+          </a:xfrm>
+          <a:prstGeom prst="rect">
+            <a:avLst/>
+          </a:prstGeom>
+          <a:solidFill>
+            <a:srgbClr val="2E7D32"/>
+          </a:solidFill>
+          <a:ln w="12700">
+            <a:solidFill>
+              <a:srgbClr val="2E7D32"/>
+            </a:solidFill>
+            <a:prstDash val="solid"/>
+          </a:ln>
+        </p:spPr>
+        <p:txBody>
+          <a:bodyPr/>
+          <a:lstStyle/>
+          <a:p>
+            <a:endParaRPr/>
+          </a:p>
+        </p:txBody>
+      </p:sp>
+      <p:sp>
+        <p:nvSpPr>
+          <p:cNvPr id="4" name="Text 2">
+            <a:extLst>
+              <a:ext uri="{FF2B5EF4-FFF2-40B4-BE49-F238E27FC236}">
+                <a16:creationId xmlns:a16="http://schemas.microsoft.com/office/drawing/2014/main" id="{00EA4D4A-383D-AFFC-A9AE-4786984FC038}"/>
+              </a:ext>
+            </a:extLst>
+          </p:cNvPr>
+          <p:cNvSpPr/>
+          <p:nvPr/>
+        </p:nvSpPr>
+        <p:spPr>
+          <a:xfrm>
+            <a:off x="444125" y="2731770"/>
+            <a:ext cx="11430000" cy="1394460"/>
+          </a:xfrm>
+          <a:prstGeom prst="rect">
+            <a:avLst/>
+          </a:prstGeom>
+          <a:noFill/>
+          <a:ln/>
+        </p:spPr>
+        <p:txBody>
+          <a:bodyPr wrap="square" rtlCol="0" anchor="ctr"/>
+          <a:lstStyle/>
+          <a:p>
+            <a:pPr marL="0" indent="0" algn="ctr">
+              <a:buNone/>
+            </a:pPr>
+            <a:r>
+              <a:rPr lang="en-US" sz="8000" b="1" dirty="0">
+                <a:solidFill>
+                  <a:srgbClr val="1B5E20"/>
+                </a:solidFill>
+                <a:latin typeface="Helvetica" pitchFamily="34" charset="0"/>
+                <a:ea typeface="Helvetica" pitchFamily="34" charset="-122"/>
+                <a:cs typeface="Helvetica" pitchFamily="34" charset="-120"/>
+              </a:rPr>
+              <a:t>Q&amp;A</a:t>
+            </a:r>
+            <a:endParaRPr lang="en-US" sz="8000" dirty="0"/>
+          </a:p>
+        </p:txBody>
+      </p:sp>
+      <p:sp>
+        <p:nvSpPr>
+          <p:cNvPr id="5" name="Shape 3">
+            <a:extLst>
+              <a:ext uri="{FF2B5EF4-FFF2-40B4-BE49-F238E27FC236}">
+                <a16:creationId xmlns:a16="http://schemas.microsoft.com/office/drawing/2014/main" id="{8601580C-2414-F160-42D1-BCE517180CD0}"/>
+              </a:ext>
+            </a:extLst>
+          </p:cNvPr>
+          <p:cNvSpPr/>
+          <p:nvPr/>
+        </p:nvSpPr>
+        <p:spPr>
+          <a:xfrm>
+            <a:off x="457200" y="1005840"/>
+            <a:ext cx="1371600" cy="54864"/>
+          </a:xfrm>
+          <a:prstGeom prst="rect">
+            <a:avLst/>
+          </a:prstGeom>
+          <a:solidFill>
+            <a:srgbClr val="2E7D32"/>
+          </a:solidFill>
+          <a:ln w="12700">
+            <a:solidFill>
+              <a:srgbClr val="2E7D32"/>
+            </a:solidFill>
+            <a:prstDash val="solid"/>
+          </a:ln>
+        </p:spPr>
+        <p:txBody>
+          <a:bodyPr/>
+          <a:lstStyle/>
+          <a:p>
+            <a:endParaRPr/>
+          </a:p>
+        </p:txBody>
+      </p:sp>
+      <p:sp>
+        <p:nvSpPr>
+          <p:cNvPr id="7" name="Text 5">
+            <a:extLst>
+              <a:ext uri="{FF2B5EF4-FFF2-40B4-BE49-F238E27FC236}">
+                <a16:creationId xmlns:a16="http://schemas.microsoft.com/office/drawing/2014/main" id="{3EC38C0A-778E-0001-2E16-E48721154B76}"/>
+              </a:ext>
+            </a:extLst>
+          </p:cNvPr>
+          <p:cNvSpPr/>
+          <p:nvPr/>
+        </p:nvSpPr>
+        <p:spPr>
+          <a:xfrm>
+            <a:off x="7772400" y="6492240"/>
+            <a:ext cx="4114800" cy="274320"/>
+          </a:xfrm>
+          <a:prstGeom prst="rect">
+            <a:avLst/>
+          </a:prstGeom>
+          <a:noFill/>
+          <a:ln/>
+        </p:spPr>
+        <p:txBody>
+          <a:bodyPr wrap="square" rtlCol="0" anchor="ctr"/>
+          <a:lstStyle/>
+          <a:p>
+            <a:pPr marL="0" indent="0" algn="r">
+              <a:buNone/>
+            </a:pPr>
+            <a:r>
+              <a:rPr lang="en-US" sz="1100" dirty="0">
+                <a:solidFill>
+                  <a:srgbClr val="555555"/>
+                </a:solidFill>
+                <a:latin typeface="Helvetica" pitchFamily="34" charset="0"/>
+                <a:ea typeface="Helvetica" pitchFamily="34" charset="-122"/>
+                <a:cs typeface="Helvetica" pitchFamily="34" charset="-120"/>
+              </a:rPr>
+              <a:t>Nguyễn Quế Lân · VNGalaxy</a:t>
+            </a:r>
+            <a:endParaRPr lang="en-US" sz="1100" dirty="0"/>
+          </a:p>
+        </p:txBody>
+      </p:sp>
+      <p:sp>
+        <p:nvSpPr>
+          <p:cNvPr id="8" name="TextBox 7">
+            <a:extLst>
+              <a:ext uri="{FF2B5EF4-FFF2-40B4-BE49-F238E27FC236}">
+                <a16:creationId xmlns:a16="http://schemas.microsoft.com/office/drawing/2014/main" id="{277CE652-1D6E-30CC-4DC1-A3A675A26FF3}"/>
+              </a:ext>
+            </a:extLst>
+          </p:cNvPr>
+          <p:cNvSpPr txBox="1"/>
+          <p:nvPr/>
+        </p:nvSpPr>
+        <p:spPr>
+          <a:xfrm>
+            <a:off x="2523460" y="4295553"/>
+            <a:ext cx="184731" cy="369332"/>
+          </a:xfrm>
+          <a:prstGeom prst="rect">
+            <a:avLst/>
+          </a:prstGeom>
+          <a:noFill/>
+        </p:spPr>
+        <p:txBody>
+          <a:bodyPr wrap="none" rtlCol="0">
+            <a:spAutoFit/>
+          </a:bodyPr>
+          <a:lstStyle/>
+          <a:p>
+            <a:endParaRPr lang="en-VN" dirty="0"/>
+          </a:p>
+        </p:txBody>
+      </p:sp>
+    </p:spTree>
+    <p:extLst>
+      <p:ext uri="{BB962C8B-B14F-4D97-AF65-F5344CB8AC3E}">
+        <p14:creationId xmlns:p14="http://schemas.microsoft.com/office/powerpoint/2010/main" val="1262537194"/>
+      </p:ext>
+    </p:extLst>
+  </p:cSld>
+  <p:clrMapOvr>
+    <a:masterClrMapping/>
+  </p:clrMapOvr>
+</p:sld>
+</file>
+
+<file path=ppt/slides/slide31.xml><?xml version="1.0" encoding="utf-8"?>
+<p:sld xmlns:a="http://schemas.openxmlformats.org/drawingml/2006/main" xmlns:r="http://schemas.openxmlformats.org/officeDocument/2006/relationships" xmlns:p="http://schemas.openxmlformats.org/presentationml/2006/main">
   <p:cSld name="Slide 30">
     <p:bg>
       <p:bgPr>
@@ -14716,6 +15098,13 @@
             <a:prstDash val="solid"/>
           </a:ln>
         </p:spPr>
+        <p:txBody>
+          <a:bodyPr/>
+          <a:lstStyle/>
+          <a:p>
+            <a:endParaRPr/>
+          </a:p>
+        </p:txBody>
       </p:sp>
       <p:sp>
         <p:nvSpPr>
@@ -14741,6 +15130,13 @@
             <a:prstDash val="solid"/>
           </a:ln>
         </p:spPr>
+        <p:txBody>
+          <a:bodyPr/>
+          <a:lstStyle/>
+          <a:p>
+            <a:endParaRPr/>
+          </a:p>
+        </p:txBody>
       </p:sp>
       <p:sp>
         <p:nvSpPr>
@@ -14805,6 +15201,13 @@
             <a:prstDash val="solid"/>
           </a:ln>
         </p:spPr>
+        <p:txBody>
+          <a:bodyPr/>
+          <a:lstStyle/>
+          <a:p>
+            <a:endParaRPr/>
+          </a:p>
+        </p:txBody>
       </p:sp>
       <p:sp>
         <p:nvSpPr>
@@ -14992,7 +15395,259 @@
 </p:sld>
 </file>
 
-<file path=ppt/slides/slide31.xml><?xml version="1.0" encoding="utf-8"?>
+<file path=ppt/slides/slide32.xml><?xml version="1.0" encoding="utf-8"?>
+<p:sld xmlns:a="http://schemas.openxmlformats.org/drawingml/2006/main" xmlns:r="http://schemas.openxmlformats.org/officeDocument/2006/relationships" xmlns:p="http://schemas.openxmlformats.org/presentationml/2006/main">
+  <p:cSld>
+    <p:bg>
+      <p:bgPr>
+        <a:solidFill>
+          <a:srgbClr val="2E7D32"/>
+        </a:solidFill>
+        <a:effectLst/>
+      </p:bgPr>
+    </p:bg>
+    <p:spTree>
+      <p:nvGrpSpPr>
+        <p:cNvPr id="1" name=""/>
+        <p:cNvGrpSpPr/>
+        <p:nvPr/>
+      </p:nvGrpSpPr>
+      <p:grpSpPr>
+        <a:xfrm>
+          <a:off x="0" y="0"/>
+          <a:ext cx="0" cy="0"/>
+          <a:chOff x="0" y="0"/>
+          <a:chExt cx="0" cy="0"/>
+        </a:xfrm>
+      </p:grpSpPr>
+      <p:sp>
+        <p:nvSpPr>
+          <p:cNvPr id="2" name="Rectangle 1"/>
+          <p:cNvSpPr/>
+          <p:nvPr/>
+        </p:nvSpPr>
+        <p:spPr>
+          <a:xfrm>
+            <a:off x="0" y="5349240"/>
+            <a:ext cx="12192000" cy="1508760"/>
+          </a:xfrm>
+          <a:prstGeom prst="rect">
+            <a:avLst/>
+          </a:prstGeom>
+          <a:solidFill>
+            <a:srgbClr val="1B3A1F"/>
+          </a:solidFill>
+          <a:ln>
+            <a:noFill/>
+          </a:ln>
+        </p:spPr>
+        <p:style>
+          <a:lnRef idx="1">
+            <a:schemeClr val="accent1"/>
+          </a:lnRef>
+          <a:fillRef idx="3">
+            <a:schemeClr val="accent1"/>
+          </a:fillRef>
+          <a:effectRef idx="2">
+            <a:schemeClr val="accent1"/>
+          </a:effectRef>
+          <a:fontRef idx="minor">
+            <a:schemeClr val="lt1"/>
+          </a:fontRef>
+        </p:style>
+        <p:txBody>
+          <a:bodyPr rtlCol="0" anchor="ctr"/>
+          <a:lstStyle/>
+          <a:p>
+            <a:pPr algn="ctr"/>
+            <a:endParaRPr/>
+          </a:p>
+        </p:txBody>
+      </p:sp>
+      <p:sp>
+        <p:nvSpPr>
+          <p:cNvPr id="3" name="TextBox 2"/>
+          <p:cNvSpPr txBox="1"/>
+          <p:nvPr/>
+        </p:nvSpPr>
+        <p:spPr>
+          <a:xfrm>
+            <a:off x="777240" y="512064"/>
+            <a:ext cx="10637520" cy="640080"/>
+          </a:xfrm>
+          <a:prstGeom prst="rect">
+            <a:avLst/>
+          </a:prstGeom>
+          <a:noFill/>
+        </p:spPr>
+        <p:txBody>
+          <a:bodyPr wrap="square" lIns="0" tIns="0" rIns="0" bIns="0">
+            <a:spAutoFit/>
+          </a:bodyPr>
+          <a:lstStyle/>
+          <a:p>
+            <a:pPr algn="ctr"/>
+            <a:r>
+              <a:rPr sz="3400" b="1">
+                <a:solidFill>
+                  <a:srgbClr val="FFFFFF"/>
+                </a:solidFill>
+                <a:latin typeface="Aptos Display"/>
+              </a:rPr>
+              <a:t>Quét mã QR để nhận tài liệu</a:t>
+            </a:r>
+          </a:p>
+        </p:txBody>
+      </p:sp>
+      <p:sp>
+        <p:nvSpPr>
+          <p:cNvPr id="4" name="TextBox 3"/>
+          <p:cNvSpPr txBox="1"/>
+          <p:nvPr/>
+        </p:nvSpPr>
+        <p:spPr>
+          <a:xfrm>
+            <a:off x="914400" y="1170432"/>
+            <a:ext cx="10363200" cy="502920"/>
+          </a:xfrm>
+          <a:prstGeom prst="rect">
+            <a:avLst/>
+          </a:prstGeom>
+          <a:noFill/>
+        </p:spPr>
+        <p:txBody>
+          <a:bodyPr wrap="square" lIns="0" tIns="0" rIns="0" bIns="0">
+            <a:spAutoFit/>
+          </a:bodyPr>
+          <a:lstStyle/>
+          <a:p>
+            <a:pPr algn="ctr"/>
+            <a:r>
+              <a:rPr sz="1900" b="0">
+                <a:solidFill>
+                  <a:srgbClr val="F7FBF6"/>
+                </a:solidFill>
+                <a:latin typeface="Aptos Display"/>
+              </a:rPr>
+              <a:t>Nhập email để nhận tài liệu về lập trình iOS</a:t>
+            </a:r>
+          </a:p>
+        </p:txBody>
+      </p:sp>
+      <p:sp>
+        <p:nvSpPr>
+          <p:cNvPr id="5" name="Rounded Rectangle 4"/>
+          <p:cNvSpPr/>
+          <p:nvPr/>
+        </p:nvSpPr>
+        <p:spPr>
+          <a:xfrm>
+            <a:off x="4178808" y="1792224"/>
+            <a:ext cx="3840480" cy="3840480"/>
+          </a:xfrm>
+          <a:prstGeom prst="roundRect">
+            <a:avLst/>
+          </a:prstGeom>
+          <a:solidFill>
+            <a:srgbClr val="FFFFFF"/>
+          </a:solidFill>
+          <a:ln w="15240">
+            <a:solidFill>
+              <a:srgbClr val="97BC62"/>
+            </a:solidFill>
+          </a:ln>
+        </p:spPr>
+        <p:style>
+          <a:lnRef idx="1">
+            <a:schemeClr val="accent1"/>
+          </a:lnRef>
+          <a:fillRef idx="3">
+            <a:schemeClr val="accent1"/>
+          </a:fillRef>
+          <a:effectRef idx="2">
+            <a:schemeClr val="accent1"/>
+          </a:effectRef>
+          <a:fontRef idx="minor">
+            <a:schemeClr val="lt1"/>
+          </a:fontRef>
+        </p:style>
+        <p:txBody>
+          <a:bodyPr rtlCol="0" anchor="ctr"/>
+          <a:lstStyle/>
+          <a:p>
+            <a:pPr algn="ctr"/>
+            <a:endParaRPr/>
+          </a:p>
+        </p:txBody>
+      </p:sp>
+      <p:pic>
+        <p:nvPicPr>
+          <p:cNvPr id="6" name="Picture 5" descr="qr-ios-materials-form-green.png"/>
+          <p:cNvPicPr>
+            <a:picLocks noChangeAspect="1"/>
+          </p:cNvPicPr>
+          <p:nvPr/>
+        </p:nvPicPr>
+        <p:blipFill>
+          <a:blip r:embed="rId2"/>
+          <a:stretch>
+            <a:fillRect/>
+          </a:stretch>
+        </p:blipFill>
+        <p:spPr>
+          <a:xfrm>
+            <a:off x="4425696" y="2039112"/>
+            <a:ext cx="3346704" cy="3346704"/>
+          </a:xfrm>
+          <a:prstGeom prst="rect">
+            <a:avLst/>
+          </a:prstGeom>
+        </p:spPr>
+      </p:pic>
+      <p:sp>
+        <p:nvSpPr>
+          <p:cNvPr id="7" name="TextBox 6"/>
+          <p:cNvSpPr txBox="1"/>
+          <p:nvPr/>
+        </p:nvSpPr>
+        <p:spPr>
+          <a:xfrm>
+            <a:off x="1828800" y="5806440"/>
+            <a:ext cx="8534400" cy="310896"/>
+          </a:xfrm>
+          <a:prstGeom prst="rect">
+            <a:avLst/>
+          </a:prstGeom>
+          <a:noFill/>
+        </p:spPr>
+        <p:txBody>
+          <a:bodyPr wrap="square" lIns="0" tIns="0" rIns="0" bIns="0">
+            <a:spAutoFit/>
+          </a:bodyPr>
+          <a:lstStyle/>
+          <a:p>
+            <a:pPr algn="ctr"/>
+            <a:r>
+              <a:rPr sz="1000" b="0">
+                <a:solidFill>
+                  <a:srgbClr val="F7FBF6"/>
+                </a:solidFill>
+                <a:latin typeface="Aptos Display"/>
+              </a:rPr>
+              <a:t>https://forms.gle/QwxUtTsD4bLW7uZZ9</a:t>
+            </a:r>
+          </a:p>
+        </p:txBody>
+      </p:sp>
+    </p:spTree>
+  </p:cSld>
+  <p:clrMapOvr>
+    <a:masterClrMapping/>
+  </p:clrMapOvr>
+</p:sld>
+</file>
+
+<file path=ppt/slides/slide33.xml><?xml version="1.0" encoding="utf-8"?>
 <p:sld xmlns:a="http://schemas.openxmlformats.org/drawingml/2006/main" xmlns:r="http://schemas.openxmlformats.org/officeDocument/2006/relationships" xmlns:p="http://schemas.openxmlformats.org/presentationml/2006/main">
   <p:cSld name="Slide 32">
     <p:bg>
@@ -15041,6 +15696,13 @@
             <a:prstDash val="solid"/>
           </a:ln>
         </p:spPr>
+        <p:txBody>
+          <a:bodyPr/>
+          <a:lstStyle/>
+          <a:p>
+            <a:endParaRPr/>
+          </a:p>
+        </p:txBody>
       </p:sp>
       <p:sp>
         <p:nvSpPr>
@@ -15066,6 +15728,13 @@
             <a:prstDash val="solid"/>
           </a:ln>
         </p:spPr>
+        <p:txBody>
+          <a:bodyPr/>
+          <a:lstStyle/>
+          <a:p>
+            <a:endParaRPr/>
+          </a:p>
+        </p:txBody>
       </p:sp>
       <p:sp>
         <p:nvSpPr>
